--- a/docs/Project_Presentation.pptx
+++ b/docs/Project_Presentation.pptx
@@ -3098,6 +3098,14 @@
 <file path=ppt/slides/slide1.xml><?xml version="1.0" encoding="utf-8"?>
 <p:sld xmlns:a="http://schemas.openxmlformats.org/drawingml/2006/main" xmlns:p="http://schemas.openxmlformats.org/presentationml/2006/main" xmlns:r="http://schemas.openxmlformats.org/officeDocument/2006/relationships">
   <p:cSld>
+    <p:bg>
+      <p:bgPr>
+        <a:solidFill>
+          <a:srgbClr val="020A05"/>
+        </a:solidFill>
+        <a:effectLst/>
+      </p:bgPr>
+    </p:bg>
     <p:spTree>
       <p:nvGrpSpPr>
         <p:cNvPr id="1" name=""/>
@@ -3874,6 +3882,14 @@
 <file path=ppt/slides/slide10.xml><?xml version="1.0" encoding="utf-8"?>
 <p:sld xmlns:a="http://schemas.openxmlformats.org/drawingml/2006/main" xmlns:p="http://schemas.openxmlformats.org/presentationml/2006/main" xmlns:r="http://schemas.openxmlformats.org/officeDocument/2006/relationships">
   <p:cSld>
+    <p:bg>
+      <p:bgPr>
+        <a:solidFill>
+          <a:srgbClr val="020A05"/>
+        </a:solidFill>
+        <a:effectLst/>
+      </p:bgPr>
+    </p:bg>
     <p:spTree>
       <p:nvGrpSpPr>
         <p:cNvPr id="1" name=""/>
@@ -4437,6 +4453,14 @@
 <file path=ppt/slides/slide11.xml><?xml version="1.0" encoding="utf-8"?>
 <p:sld xmlns:a="http://schemas.openxmlformats.org/drawingml/2006/main" xmlns:p="http://schemas.openxmlformats.org/presentationml/2006/main" xmlns:r="http://schemas.openxmlformats.org/officeDocument/2006/relationships">
   <p:cSld>
+    <p:bg>
+      <p:bgPr>
+        <a:solidFill>
+          <a:srgbClr val="020A05"/>
+        </a:solidFill>
+        <a:effectLst/>
+      </p:bgPr>
+    </p:bg>
     <p:spTree>
       <p:nvGrpSpPr>
         <p:cNvPr id="1" name=""/>
@@ -4996,6 +5020,14 @@
 <file path=ppt/slides/slide12.xml><?xml version="1.0" encoding="utf-8"?>
 <p:sld xmlns:a="http://schemas.openxmlformats.org/drawingml/2006/main" xmlns:p="http://schemas.openxmlformats.org/presentationml/2006/main" xmlns:r="http://schemas.openxmlformats.org/officeDocument/2006/relationships">
   <p:cSld>
+    <p:bg>
+      <p:bgPr>
+        <a:solidFill>
+          <a:srgbClr val="020A05"/>
+        </a:solidFill>
+        <a:effectLst/>
+      </p:bgPr>
+    </p:bg>
     <p:spTree>
       <p:nvGrpSpPr>
         <p:cNvPr id="1" name=""/>
@@ -5556,6 +5588,14 @@
 <file path=ppt/slides/slide13.xml><?xml version="1.0" encoding="utf-8"?>
 <p:sld xmlns:a="http://schemas.openxmlformats.org/drawingml/2006/main" xmlns:p="http://schemas.openxmlformats.org/presentationml/2006/main" xmlns:r="http://schemas.openxmlformats.org/officeDocument/2006/relationships">
   <p:cSld>
+    <p:bg>
+      <p:bgPr>
+        <a:solidFill>
+          <a:srgbClr val="020A05"/>
+        </a:solidFill>
+        <a:effectLst/>
+      </p:bgPr>
+    </p:bg>
     <p:spTree>
       <p:nvGrpSpPr>
         <p:cNvPr id="1" name=""/>
@@ -6115,6 +6155,14 @@
 <file path=ppt/slides/slide14.xml><?xml version="1.0" encoding="utf-8"?>
 <p:sld xmlns:a="http://schemas.openxmlformats.org/drawingml/2006/main" xmlns:p="http://schemas.openxmlformats.org/presentationml/2006/main" xmlns:r="http://schemas.openxmlformats.org/officeDocument/2006/relationships">
   <p:cSld>
+    <p:bg>
+      <p:bgPr>
+        <a:solidFill>
+          <a:srgbClr val="020A05"/>
+        </a:solidFill>
+        <a:effectLst/>
+      </p:bgPr>
+    </p:bg>
     <p:spTree>
       <p:nvGrpSpPr>
         <p:cNvPr id="1" name=""/>
@@ -6852,6 +6900,14 @@
 <file path=ppt/slides/slide15.xml><?xml version="1.0" encoding="utf-8"?>
 <p:sld xmlns:a="http://schemas.openxmlformats.org/drawingml/2006/main" xmlns:p="http://schemas.openxmlformats.org/presentationml/2006/main" xmlns:r="http://schemas.openxmlformats.org/officeDocument/2006/relationships">
   <p:cSld>
+    <p:bg>
+      <p:bgPr>
+        <a:solidFill>
+          <a:srgbClr val="020A05"/>
+        </a:solidFill>
+        <a:effectLst/>
+      </p:bgPr>
+    </p:bg>
     <p:spTree>
       <p:nvGrpSpPr>
         <p:cNvPr id="1" name=""/>
@@ -7416,6 +7472,14 @@
 <file path=ppt/slides/slide16.xml><?xml version="1.0" encoding="utf-8"?>
 <p:sld xmlns:a="http://schemas.openxmlformats.org/drawingml/2006/main" xmlns:p="http://schemas.openxmlformats.org/presentationml/2006/main" xmlns:r="http://schemas.openxmlformats.org/officeDocument/2006/relationships">
   <p:cSld>
+    <p:bg>
+      <p:bgPr>
+        <a:solidFill>
+          <a:srgbClr val="020A05"/>
+        </a:solidFill>
+        <a:effectLst/>
+      </p:bgPr>
+    </p:bg>
     <p:spTree>
       <p:nvGrpSpPr>
         <p:cNvPr id="1" name=""/>
@@ -7979,6 +8043,14 @@
 <file path=ppt/slides/slide17.xml><?xml version="1.0" encoding="utf-8"?>
 <p:sld xmlns:a="http://schemas.openxmlformats.org/drawingml/2006/main" xmlns:p="http://schemas.openxmlformats.org/presentationml/2006/main" xmlns:r="http://schemas.openxmlformats.org/officeDocument/2006/relationships">
   <p:cSld>
+    <p:bg>
+      <p:bgPr>
+        <a:solidFill>
+          <a:srgbClr val="020A05"/>
+        </a:solidFill>
+        <a:effectLst/>
+      </p:bgPr>
+    </p:bg>
     <p:spTree>
       <p:nvGrpSpPr>
         <p:cNvPr id="1" name=""/>
@@ -8590,6 +8662,14 @@
 <file path=ppt/slides/slide18.xml><?xml version="1.0" encoding="utf-8"?>
 <p:sld xmlns:a="http://schemas.openxmlformats.org/drawingml/2006/main" xmlns:p="http://schemas.openxmlformats.org/presentationml/2006/main" xmlns:r="http://schemas.openxmlformats.org/officeDocument/2006/relationships">
   <p:cSld>
+    <p:bg>
+      <p:bgPr>
+        <a:solidFill>
+          <a:srgbClr val="020A05"/>
+        </a:solidFill>
+        <a:effectLst/>
+      </p:bgPr>
+    </p:bg>
     <p:spTree>
       <p:nvGrpSpPr>
         <p:cNvPr id="1" name=""/>
@@ -9225,6 +9305,14 @@
 <file path=ppt/slides/slide2.xml><?xml version="1.0" encoding="utf-8"?>
 <p:sld xmlns:a="http://schemas.openxmlformats.org/drawingml/2006/main" xmlns:p="http://schemas.openxmlformats.org/presentationml/2006/main" xmlns:r="http://schemas.openxmlformats.org/officeDocument/2006/relationships">
   <p:cSld>
+    <p:bg>
+      <p:bgPr>
+        <a:solidFill>
+          <a:srgbClr val="020A05"/>
+        </a:solidFill>
+        <a:effectLst/>
+      </p:bgPr>
+    </p:bg>
     <p:spTree>
       <p:nvGrpSpPr>
         <p:cNvPr id="1" name=""/>
@@ -9793,7 +9881,7 @@
                   <a:srgbClr val="8CF0AF"/>
                 </a:solidFill>
               </a:rPr>
-              <a:t>Free-text notes (e.g., concurrent typhoid or dengue fever) are parsed by Stage-3 LLM and integrated into the twin using Elastic Weight Consolidation (EWC).</a:t>
+              <a:t>Free-text notes (such as concurrent typhoid or dengue fever) are parsed by Stage-3 LLM and integrated into the twin using Elastic Weight Consolidation (EWC).</a:t>
             </a:r>
           </a:p>
           <a:p>
@@ -9833,6 +9921,14 @@
 <file path=ppt/slides/slide3.xml><?xml version="1.0" encoding="utf-8"?>
 <p:sld xmlns:a="http://schemas.openxmlformats.org/drawingml/2006/main" xmlns:p="http://schemas.openxmlformats.org/presentationml/2006/main" xmlns:r="http://schemas.openxmlformats.org/officeDocument/2006/relationships">
   <p:cSld>
+    <p:bg>
+      <p:bgPr>
+        <a:solidFill>
+          <a:srgbClr val="020A05"/>
+        </a:solidFill>
+        <a:effectLst/>
+      </p:bgPr>
+    </p:bg>
     <p:spTree>
       <p:nvGrpSpPr>
         <p:cNvPr id="1" name=""/>
@@ -10280,10 +10376,7 @@
                   <a:srgbClr val="8CF0AF"/>
                 </a:solidFill>
               </a:rPr>
-              <a:t>Stream 1: Static EHR (60 features)
-Stream 2: Dynamic Wearables (20 ch x 12h)
-Stream 3: Environmental AQI (70+ stations)
-Database: PostgreSQL 16 + SQLAlchemy</a:t>
+              <a:t>Stream 1: Static EHR (60 features) • Stream 2: Dynamic Wearables (20 ch x 12h) • Stream 3: Environmental AQI (70+ stations) • Database: PostgreSQL 16 + SQLAlchemy</a:t>
             </a:r>
           </a:p>
           <a:p>
@@ -10378,6 +10471,14 @@
 <file path=ppt/slides/slide4.xml><?xml version="1.0" encoding="utf-8"?>
 <p:sld xmlns:a="http://schemas.openxmlformats.org/drawingml/2006/main" xmlns:p="http://schemas.openxmlformats.org/presentationml/2006/main" xmlns:r="http://schemas.openxmlformats.org/officeDocument/2006/relationships">
   <p:cSld>
+    <p:bg>
+      <p:bgPr>
+        <a:solidFill>
+          <a:srgbClr val="020A05"/>
+        </a:solidFill>
+        <a:effectLst/>
+      </p:bgPr>
+    </p:bg>
     <p:spTree>
       <p:nvGrpSpPr>
         <p:cNvPr id="1" name=""/>
@@ -11212,6 +11313,14 @@
 <file path=ppt/slides/slide5.xml><?xml version="1.0" encoding="utf-8"?>
 <p:sld xmlns:a="http://schemas.openxmlformats.org/drawingml/2006/main" xmlns:p="http://schemas.openxmlformats.org/presentationml/2006/main" xmlns:r="http://schemas.openxmlformats.org/officeDocument/2006/relationships">
   <p:cSld>
+    <p:bg>
+      <p:bgPr>
+        <a:solidFill>
+          <a:srgbClr val="020A05"/>
+        </a:solidFill>
+        <a:effectLst/>
+      </p:bgPr>
+    </p:bg>
     <p:spTree>
       <p:nvGrpSpPr>
         <p:cNvPr id="1" name=""/>
@@ -11998,6 +12107,14 @@
 <file path=ppt/slides/slide6.xml><?xml version="1.0" encoding="utf-8"?>
 <p:sld xmlns:a="http://schemas.openxmlformats.org/drawingml/2006/main" xmlns:p="http://schemas.openxmlformats.org/presentationml/2006/main" xmlns:r="http://schemas.openxmlformats.org/officeDocument/2006/relationships">
   <p:cSld>
+    <p:bg>
+      <p:bgPr>
+        <a:solidFill>
+          <a:srgbClr val="020A05"/>
+        </a:solidFill>
+        <a:effectLst/>
+      </p:bgPr>
+    </p:bg>
     <p:spTree>
       <p:nvGrpSpPr>
         <p:cNvPr id="1" name=""/>
@@ -12860,6 +12977,14 @@
 <file path=ppt/slides/slide7.xml><?xml version="1.0" encoding="utf-8"?>
 <p:sld xmlns:a="http://schemas.openxmlformats.org/drawingml/2006/main" xmlns:p="http://schemas.openxmlformats.org/presentationml/2006/main" xmlns:r="http://schemas.openxmlformats.org/officeDocument/2006/relationships">
   <p:cSld>
+    <p:bg>
+      <p:bgPr>
+        <a:solidFill>
+          <a:srgbClr val="020A05"/>
+        </a:solidFill>
+        <a:effectLst/>
+      </p:bgPr>
+    </p:bg>
     <p:spTree>
       <p:nvGrpSpPr>
         <p:cNvPr id="1" name=""/>
@@ -13493,6 +13618,14 @@
 <file path=ppt/slides/slide8.xml><?xml version="1.0" encoding="utf-8"?>
 <p:sld xmlns:a="http://schemas.openxmlformats.org/drawingml/2006/main" xmlns:p="http://schemas.openxmlformats.org/presentationml/2006/main" xmlns:r="http://schemas.openxmlformats.org/officeDocument/2006/relationships">
   <p:cSld>
+    <p:bg>
+      <p:bgPr>
+        <a:solidFill>
+          <a:srgbClr val="020A05"/>
+        </a:solidFill>
+        <a:effectLst/>
+      </p:bgPr>
+    </p:bg>
     <p:spTree>
       <p:nvGrpSpPr>
         <p:cNvPr id="1" name=""/>
@@ -14076,6 +14209,14 @@
 <file path=ppt/slides/slide9.xml><?xml version="1.0" encoding="utf-8"?>
 <p:sld xmlns:a="http://schemas.openxmlformats.org/drawingml/2006/main" xmlns:p="http://schemas.openxmlformats.org/presentationml/2006/main" xmlns:r="http://schemas.openxmlformats.org/officeDocument/2006/relationships">
   <p:cSld>
+    <p:bg>
+      <p:bgPr>
+        <a:solidFill>
+          <a:srgbClr val="020A05"/>
+        </a:solidFill>
+        <a:effectLst/>
+      </p:bgPr>
+    </p:bg>
     <p:spTree>
       <p:nvGrpSpPr>
         <p:cNvPr id="1" name=""/>
